--- a/templates/44-state-modelling-template.pptx
+++ b/templates/44-state-modelling-template.pptx
@@ -3558,7 +3558,7 @@
         <p:spPr>
           <a:xfrm>
             <a:off x="457200" y="1207008"/>
-            <a:ext cx="2743200" cy="182880"/>
+            <a:ext cx="11277295" cy="274320"/>
           </a:xfrm>
           <a:prstGeom prst="rect">
             <a:avLst/>
@@ -3574,13 +3574,13 @@
           <a:p>
             <a:pPr algn="l"/>
             <a:r>
-              <a:rPr lang="en-AU" sz="800" b="1" dirty="0">
+              <a:rPr lang="en-AU" sz="1250" b="1" dirty="0">
                 <a:solidFill>
-                  <a:srgbClr val="6B6A66"/>
+                  <a:srgbClr val="184F95"/>
                 </a:solidFill>
                 <a:latin typeface="Aptos"/>
               </a:rPr>
-              <a:t>HOW TO FILL IT IN</a:t>
+              <a:t>State Modelling — blank template</a:t>
             </a:r>
           </a:p>
         </p:txBody>
@@ -3593,8 +3593,8 @@
         </p:nvSpPr>
         <p:spPr>
           <a:xfrm>
-            <a:off x="457200" y="1408176"/>
-            <a:ext cx="2743200" cy="914400"/>
+            <a:off x="457200" y="6089904"/>
+            <a:ext cx="11277295" cy="347472"/>
           </a:xfrm>
           <a:prstGeom prst="rect">
             <a:avLst/>
@@ -3610,274 +3610,26 @@
           <a:p>
             <a:pPr algn="l"/>
             <a:r>
-              <a:rPr lang="en-AU" sz="950" dirty="0">
-                <a:solidFill>
-                  <a:srgbClr val="0B0B0B"/>
-                </a:solidFill>
-                <a:latin typeface="Aptos"/>
-              </a:rPr>
-              <a:t>Name the event on every transition. Then ask which transitions are missing, and which should be forbidden.</a:t>
-            </a:r>
-          </a:p>
-        </p:txBody>
-      </p:sp>
-      <p:sp>
-        <p:nvSpPr>
-          <p:cNvPr id="44" name="shape44"/>
-          <p:cNvSpPr/>
-          <p:nvPr/>
-        </p:nvSpPr>
-        <p:spPr>
-          <a:xfrm>
-            <a:off x="457200" y="2414016"/>
-            <a:ext cx="2743200" cy="182880"/>
-          </a:xfrm>
-          <a:prstGeom prst="rect">
-            <a:avLst/>
-          </a:prstGeom>
-          <a:noFill/>
-          <a:ln>
-            <a:noFill/>
-          </a:ln>
-        </p:spPr>
-        <p:txBody>
-          <a:bodyPr wrap="square" anchor="b" lIns="0" rIns="0" tIns="27432" bIns="27432"/>
-          <a:lstStyle/>
-          <a:p>
-            <a:pPr algn="l"/>
-            <a:r>
-              <a:rPr lang="en-AU" sz="800" b="1" dirty="0">
+              <a:rPr lang="en-AU" sz="850" dirty="0">
                 <a:solidFill>
                   <a:srgbClr val="6B6A66"/>
                 </a:solidFill>
                 <a:latin typeface="Aptos"/>
               </a:rPr>
-              <a:t>WHAT IT IS FOR</a:t>
-            </a:r>
-          </a:p>
-        </p:txBody>
-      </p:sp>
-      <p:sp>
-        <p:nvSpPr>
-          <p:cNvPr id="45" name="shape45"/>
-          <p:cNvSpPr/>
-          <p:nvPr/>
-        </p:nvSpPr>
-        <p:spPr>
-          <a:xfrm>
-            <a:off x="457200" y="2615184"/>
-            <a:ext cx="2743200" cy="731520"/>
-          </a:xfrm>
-          <a:prstGeom prst="rect">
-            <a:avLst/>
-          </a:prstGeom>
-          <a:noFill/>
-          <a:ln>
-            <a:noFill/>
-          </a:ln>
-        </p:spPr>
-        <p:txBody>
-          <a:bodyPr wrap="square" anchor="t" lIns="0" rIns="0" tIns="27432" bIns="27432"/>
-          <a:lstStyle/>
-          <a:p>
-            <a:pPr algn="l"/>
-            <a:r>
-              <a:rPr lang="en-AU" sz="950" dirty="0">
-                <a:solidFill>
-                  <a:srgbClr val="0B0B0B"/>
-                </a:solidFill>
-                <a:latin typeface="Aptos"/>
-              </a:rPr>
-              <a:t>Describes the states an object can occupy, the transitions between them and the events and conditions that permit each transition.</a:t>
-            </a:r>
-          </a:p>
-        </p:txBody>
-      </p:sp>
-      <p:sp>
-        <p:nvSpPr>
-          <p:cNvPr id="46" name="shape46"/>
-          <p:cNvSpPr/>
-          <p:nvPr/>
-        </p:nvSpPr>
-        <p:spPr>
-          <a:xfrm>
-            <a:off x="457200" y="3438144"/>
-            <a:ext cx="2743200" cy="182880"/>
-          </a:xfrm>
-          <a:prstGeom prst="rect">
-            <a:avLst/>
-          </a:prstGeom>
-          <a:noFill/>
-          <a:ln>
-            <a:noFill/>
-          </a:ln>
-        </p:spPr>
-        <p:txBody>
-          <a:bodyPr wrap="square" anchor="b" lIns="0" rIns="0" tIns="27432" bIns="27432"/>
-          <a:lstStyle/>
-          <a:p>
-            <a:pPr algn="l"/>
-            <a:r>
-              <a:rPr lang="en-AU" sz="800" b="1" dirty="0">
-                <a:solidFill>
-                  <a:srgbClr val="6B6A66"/>
-                </a:solidFill>
-                <a:latin typeface="Aptos"/>
-              </a:rPr>
-              <a:t>MOST OFTEN CONFUSED WITH</a:t>
-            </a:r>
-          </a:p>
-        </p:txBody>
-      </p:sp>
-      <p:sp>
-        <p:nvSpPr>
-          <p:cNvPr id="47" name="shape47"/>
-          <p:cNvSpPr/>
-          <p:nvPr/>
-        </p:nvSpPr>
-        <p:spPr>
-          <a:xfrm>
-            <a:off x="457200" y="3639312"/>
-            <a:ext cx="2743200" cy="1737360"/>
-          </a:xfrm>
-          <a:prstGeom prst="rect">
-            <a:avLst/>
-          </a:prstGeom>
-          <a:solidFill>
-            <a:srgbClr val="F7F7F5"/>
-          </a:solidFill>
-          <a:ln>
-            <a:noFill/>
-          </a:ln>
-        </p:spPr>
-        <p:txBody>
-          <a:bodyPr wrap="square" anchor="t" lIns="91440" rIns="91440" tIns="27432" bIns="27432"/>
-          <a:lstStyle/>
-          <a:p>
-            <a:pPr algn="l"/>
-            <a:r>
-              <a:rPr lang="en-AU" sz="900" dirty="0">
-                <a:solidFill>
-                  <a:srgbClr val="0B0B0B"/>
-                </a:solidFill>
-                <a:latin typeface="Aptos"/>
-              </a:rPr>
-              <a:t>State modelling tracks what an object may become; process modelling tracks what people do. If the stem is full of statuses such as lodged, assessed, withdrawn, it is state.</a:t>
-            </a:r>
-          </a:p>
-        </p:txBody>
-      </p:sp>
-      <p:sp>
-        <p:nvSpPr>
-          <p:cNvPr id="48" name="shape48"/>
-          <p:cNvSpPr/>
-          <p:nvPr/>
-        </p:nvSpPr>
-        <p:spPr>
-          <a:xfrm>
-            <a:off x="457200" y="3639312"/>
-            <a:ext cx="32004" cy="1737360"/>
-          </a:xfrm>
-          <a:prstGeom prst="rect">
-            <a:avLst/>
-          </a:prstGeom>
-          <a:solidFill>
-            <a:srgbClr val="FAB219"/>
-          </a:solidFill>
-          <a:ln>
-            <a:noFill/>
-          </a:ln>
-        </p:spPr>
-        <p:txBody>
-          <a:bodyPr wrap="square" anchor="ctr" lIns="54864" rIns="54864" tIns="27432" bIns="27432"/>
-          <a:lstStyle/>
-          <a:p>
-            <a:pPr algn="l"/>
-            <a:endParaRPr lang="en-AU" sz="1100"/>
-          </a:p>
-        </p:txBody>
-      </p:sp>
-      <p:sp>
-        <p:nvSpPr>
-          <p:cNvPr id="49" name="shape49"/>
-          <p:cNvSpPr/>
-          <p:nvPr/>
-        </p:nvSpPr>
-        <p:spPr>
-          <a:xfrm>
-            <a:off x="457200" y="5486400"/>
-            <a:ext cx="2743200" cy="502920"/>
-          </a:xfrm>
-          <a:prstGeom prst="rect">
-            <a:avLst/>
-          </a:prstGeom>
-          <a:noFill/>
-          <a:ln>
-            <a:noFill/>
-          </a:ln>
-        </p:spPr>
-        <p:txBody>
-          <a:bodyPr wrap="square" anchor="t" lIns="0" rIns="0" tIns="27432" bIns="27432"/>
-          <a:lstStyle/>
-          <a:p>
-            <a:pPr algn="l"/>
-            <a:r>
-              <a:rPr lang="en-AU" sz="800" dirty="0">
-                <a:solidFill>
-                  <a:srgbClr val="6B6A66"/>
-                </a:solidFill>
-                <a:latin typeface="Aptos"/>
-              </a:rPr>
-              <a:t>Tasks: 7.1 Specify and Model Requirements · 6.1 Analyze Current State</a:t>
-            </a:r>
-          </a:p>
-        </p:txBody>
-      </p:sp>
-      <p:sp>
-        <p:nvSpPr>
-          <p:cNvPr id="50" name="shape50"/>
-          <p:cNvSpPr/>
-          <p:nvPr/>
-        </p:nvSpPr>
-        <p:spPr>
-          <a:xfrm>
-            <a:off x="3520440" y="1188720"/>
-            <a:ext cx="8214055" cy="237744"/>
-          </a:xfrm>
-          <a:prstGeom prst="rect">
-            <a:avLst/>
-          </a:prstGeom>
-          <a:noFill/>
-          <a:ln>
-            <a:noFill/>
-          </a:ln>
-        </p:spPr>
-        <p:txBody>
-          <a:bodyPr wrap="square" anchor="b" lIns="0" rIns="0" tIns="27432" bIns="27432"/>
-          <a:lstStyle/>
-          <a:p>
-            <a:pPr algn="l"/>
-            <a:r>
-              <a:rPr lang="en-AU" sz="1050" b="1" dirty="0">
-                <a:solidFill>
-                  <a:srgbClr val="184F95"/>
-                </a:solidFill>
-                <a:latin typeface="Aptos"/>
-              </a:rPr>
-              <a:t>State Modelling — blank template</a:t>
+              <a:t>Name the event on every transition. Then ask which transitions are missing, and which should be forbidden.</a:t>
             </a:r>
           </a:p>
         </p:txBody>
       </p:sp>
       <p:cxnSp>
         <p:nvCxnSpPr>
-          <p:cNvPr id="51" name="conn51"/>
+          <p:cNvPr id="44" name="conn44"/>
           <p:cNvCxnSpPr/>
           <p:nvPr/>
         </p:nvCxnSpPr>
         <p:spPr>
           <a:xfrm>
-            <a:off x="4493209" y="1728216"/>
+            <a:off x="1940509" y="1929384"/>
             <a:ext cx="475488" cy="1"/>
           </a:xfrm>
           <a:prstGeom prst="line">
@@ -3893,13 +3645,13 @@
       </p:cxnSp>
       <p:cxnSp>
         <p:nvCxnSpPr>
-          <p:cNvPr id="52" name="conn52"/>
+          <p:cNvPr id="45" name="conn45"/>
           <p:cNvCxnSpPr/>
           <p:nvPr/>
         </p:nvCxnSpPr>
         <p:spPr>
           <a:xfrm>
-            <a:off x="5941466" y="1728216"/>
+            <a:off x="3899306" y="1929384"/>
             <a:ext cx="475488" cy="1"/>
           </a:xfrm>
           <a:prstGeom prst="line">
@@ -3915,13 +3667,13 @@
       </p:cxnSp>
       <p:cxnSp>
         <p:nvCxnSpPr>
-          <p:cNvPr id="53" name="conn53"/>
+          <p:cNvPr id="46" name="conn46"/>
           <p:cNvCxnSpPr/>
           <p:nvPr/>
         </p:nvCxnSpPr>
         <p:spPr>
           <a:xfrm>
-            <a:off x="7389724" y="1728216"/>
+            <a:off x="5858104" y="1929384"/>
             <a:ext cx="475488" cy="1"/>
           </a:xfrm>
           <a:prstGeom prst="line">
@@ -3937,13 +3689,13 @@
       </p:cxnSp>
       <p:cxnSp>
         <p:nvCxnSpPr>
-          <p:cNvPr id="54" name="conn54"/>
+          <p:cNvPr id="47" name="conn47"/>
           <p:cNvCxnSpPr/>
           <p:nvPr/>
         </p:nvCxnSpPr>
         <p:spPr>
           <a:xfrm>
-            <a:off x="8837981" y="1728216"/>
+            <a:off x="7816901" y="1929384"/>
             <a:ext cx="475488" cy="1"/>
           </a:xfrm>
           <a:prstGeom prst="line">
@@ -3959,14 +3711,14 @@
       </p:cxnSp>
       <p:sp>
         <p:nvSpPr>
-          <p:cNvPr id="55" name="shape55"/>
+          <p:cNvPr id="48" name="shape48"/>
           <p:cNvSpPr/>
           <p:nvPr/>
         </p:nvSpPr>
         <p:spPr>
           <a:xfrm>
-            <a:off x="3520440" y="1499616"/>
-            <a:ext cx="972769" cy="457200"/>
+            <a:off x="457200" y="1700784"/>
+            <a:ext cx="1483309" cy="457200"/>
           </a:xfrm>
           <a:prstGeom prst="roundRect">
             <a:avLst>
@@ -4001,14 +3753,14 @@
       </p:sp>
       <p:sp>
         <p:nvSpPr>
-          <p:cNvPr id="56" name="shape56"/>
+          <p:cNvPr id="49" name="shape49"/>
           <p:cNvSpPr/>
           <p:nvPr/>
         </p:nvSpPr>
         <p:spPr>
           <a:xfrm>
-            <a:off x="4968697" y="1499616"/>
-            <a:ext cx="972769" cy="457200"/>
+            <a:off x="2415997" y="1700784"/>
+            <a:ext cx="1483309" cy="457200"/>
           </a:xfrm>
           <a:prstGeom prst="roundRect">
             <a:avLst>
@@ -4043,14 +3795,14 @@
       </p:sp>
       <p:sp>
         <p:nvSpPr>
-          <p:cNvPr id="57" name="shape57"/>
+          <p:cNvPr id="50" name="shape50"/>
           <p:cNvSpPr/>
           <p:nvPr/>
         </p:nvSpPr>
         <p:spPr>
           <a:xfrm>
-            <a:off x="6416954" y="1499616"/>
-            <a:ext cx="972769" cy="457200"/>
+            <a:off x="4374794" y="1700784"/>
+            <a:ext cx="1483309" cy="457200"/>
           </a:xfrm>
           <a:prstGeom prst="roundRect">
             <a:avLst>
@@ -4085,14 +3837,14 @@
       </p:sp>
       <p:sp>
         <p:nvSpPr>
-          <p:cNvPr id="58" name="shape58"/>
+          <p:cNvPr id="51" name="shape51"/>
           <p:cNvSpPr/>
           <p:nvPr/>
         </p:nvSpPr>
         <p:spPr>
           <a:xfrm>
-            <a:off x="7865212" y="1499616"/>
-            <a:ext cx="972769" cy="457200"/>
+            <a:off x="6333592" y="1700784"/>
+            <a:ext cx="1483309" cy="457200"/>
           </a:xfrm>
           <a:prstGeom prst="roundRect">
             <a:avLst>
@@ -4127,14 +3879,14 @@
       </p:sp>
       <p:sp>
         <p:nvSpPr>
-          <p:cNvPr id="59" name="shape59"/>
+          <p:cNvPr id="52" name="shape52"/>
           <p:cNvSpPr/>
           <p:nvPr/>
         </p:nvSpPr>
         <p:spPr>
           <a:xfrm>
-            <a:off x="9313469" y="1499616"/>
-            <a:ext cx="972769" cy="457200"/>
+            <a:off x="8292389" y="1700784"/>
+            <a:ext cx="1483309" cy="457200"/>
           </a:xfrm>
           <a:prstGeom prst="roundRect">
             <a:avLst>
@@ -4169,14 +3921,14 @@
       </p:sp>
       <p:sp>
         <p:nvSpPr>
-          <p:cNvPr id="60" name="shape60"/>
+          <p:cNvPr id="53" name="shape53"/>
           <p:cNvSpPr/>
           <p:nvPr/>
         </p:nvSpPr>
         <p:spPr>
           <a:xfrm>
-            <a:off x="10761726" y="1499616"/>
-            <a:ext cx="972769" cy="457200"/>
+            <a:off x="10251186" y="1700784"/>
+            <a:ext cx="1483309" cy="457200"/>
           </a:xfrm>
           <a:prstGeom prst="roundRect">
             <a:avLst>
